--- a/bright-38-bundle-cover.pptx
+++ b/bright-38-bundle-cover.pptx
@@ -3088,20 +3088,12 @@
         <p:nvPr/>
       </p:nvGrpSpPr>
       <p:grpSpPr/>
-      <p:pic>
-        <p:nvPicPr>
-          <p:cNvPr id="2" name="Picture 1" descr="bright-38-bundle-cover.png"/>
-          <p:cNvPicPr>
-            <a:picLocks noChangeAspect="1"/>
-          </p:cNvPicPr>
+      <p:sp>
+        <p:nvSpPr>
+          <p:cNvPr id="2" name="Rectangle 1"/>
+          <p:cNvSpPr/>
           <p:nvPr/>
-        </p:nvPicPr>
-        <p:blipFill>
-          <a:blip r:embed="rId2"/>
-          <a:stretch>
-            <a:fillRect/>
-          </a:stretch>
-        </p:blipFill>
+        </p:nvSpPr>
         <p:spPr>
           <a:xfrm>
             <a:off x="0" y="0"/>
@@ -3110,8 +3102,382 @@
           <a:prstGeom prst="rect">
             <a:avLst/>
           </a:prstGeom>
+          <a:solidFill>
+            <a:srgbClr val="FBFAF7"/>
+          </a:solidFill>
+          <a:ln>
+            <a:noFill/>
+          </a:ln>
+          <a:effectLst/>
         </p:spPr>
-      </p:pic>
+        <p:style>
+          <a:lnRef idx="1">
+            <a:schemeClr val="accent1"/>
+          </a:lnRef>
+          <a:fillRef idx="3">
+            <a:schemeClr val="accent1"/>
+          </a:fillRef>
+          <a:effectRef idx="2">
+            <a:schemeClr val="accent1"/>
+          </a:effectRef>
+          <a:fontRef idx="minor">
+            <a:schemeClr val="lt1"/>
+          </a:fontRef>
+        </p:style>
+        <p:txBody>
+          <a:bodyPr rtlCol="0" anchor="ctr"/>
+          <a:lstStyle/>
+          <a:p>
+            <a:pPr algn="ctr"/>
+          </a:p>
+        </p:txBody>
+      </p:sp>
+      <p:sp>
+        <p:nvSpPr>
+          <p:cNvPr id="3" name="Rectangle 2"/>
+          <p:cNvSpPr/>
+          <p:nvPr/>
+        </p:nvSpPr>
+        <p:spPr>
+          <a:xfrm>
+            <a:off x="3049786" y="981075"/>
+            <a:ext cx="571500" cy="9525"/>
+          </a:xfrm>
+          <a:prstGeom prst="rect">
+            <a:avLst/>
+          </a:prstGeom>
+          <a:solidFill>
+            <a:srgbClr val="97A98C"/>
+          </a:solidFill>
+          <a:ln>
+            <a:noFill/>
+          </a:ln>
+          <a:effectLst/>
+        </p:spPr>
+        <p:style>
+          <a:lnRef idx="1">
+            <a:schemeClr val="accent1"/>
+          </a:lnRef>
+          <a:fillRef idx="3">
+            <a:schemeClr val="accent1"/>
+          </a:fillRef>
+          <a:effectRef idx="2">
+            <a:schemeClr val="accent1"/>
+          </a:effectRef>
+          <a:fontRef idx="minor">
+            <a:schemeClr val="lt1"/>
+          </a:fontRef>
+        </p:style>
+        <p:txBody>
+          <a:bodyPr rtlCol="0" anchor="ctr"/>
+          <a:lstStyle/>
+          <a:p>
+            <a:pPr algn="ctr"/>
+          </a:p>
+        </p:txBody>
+      </p:sp>
+      <p:sp>
+        <p:nvSpPr>
+          <p:cNvPr id="4" name="Rectangle 3"/>
+          <p:cNvSpPr/>
+          <p:nvPr/>
+        </p:nvSpPr>
+        <p:spPr>
+          <a:xfrm>
+            <a:off x="6665714" y="981075"/>
+            <a:ext cx="571500" cy="9525"/>
+          </a:xfrm>
+          <a:prstGeom prst="rect">
+            <a:avLst/>
+          </a:prstGeom>
+          <a:solidFill>
+            <a:srgbClr val="97A98C"/>
+          </a:solidFill>
+          <a:ln>
+            <a:noFill/>
+          </a:ln>
+          <a:effectLst/>
+        </p:spPr>
+        <p:style>
+          <a:lnRef idx="1">
+            <a:schemeClr val="accent1"/>
+          </a:lnRef>
+          <a:fillRef idx="3">
+            <a:schemeClr val="accent1"/>
+          </a:fillRef>
+          <a:effectRef idx="2">
+            <a:schemeClr val="accent1"/>
+          </a:effectRef>
+          <a:fontRef idx="minor">
+            <a:schemeClr val="lt1"/>
+          </a:fontRef>
+        </p:style>
+        <p:txBody>
+          <a:bodyPr rtlCol="0" anchor="ctr"/>
+          <a:lstStyle/>
+          <a:p>
+            <a:pPr algn="ctr"/>
+          </a:p>
+        </p:txBody>
+      </p:sp>
+      <p:sp>
+        <p:nvSpPr>
+          <p:cNvPr id="5" name="Rectangle 4"/>
+          <p:cNvSpPr/>
+          <p:nvPr/>
+        </p:nvSpPr>
+        <p:spPr>
+          <a:xfrm>
+            <a:off x="4762500" y="6802041"/>
+            <a:ext cx="762000" cy="9525"/>
+          </a:xfrm>
+          <a:prstGeom prst="rect">
+            <a:avLst/>
+          </a:prstGeom>
+          <a:solidFill>
+            <a:srgbClr val="E6D2CB"/>
+          </a:solidFill>
+          <a:ln>
+            <a:noFill/>
+          </a:ln>
+          <a:effectLst/>
+        </p:spPr>
+        <p:style>
+          <a:lnRef idx="1">
+            <a:schemeClr val="accent1"/>
+          </a:lnRef>
+          <a:fillRef idx="3">
+            <a:schemeClr val="accent1"/>
+          </a:fillRef>
+          <a:effectRef idx="2">
+            <a:schemeClr val="accent1"/>
+          </a:effectRef>
+          <a:fontRef idx="minor">
+            <a:schemeClr val="lt1"/>
+          </a:fontRef>
+        </p:style>
+        <p:txBody>
+          <a:bodyPr rtlCol="0" anchor="ctr"/>
+          <a:lstStyle/>
+          <a:p>
+            <a:pPr algn="ctr"/>
+          </a:p>
+        </p:txBody>
+      </p:sp>
+      <p:sp>
+        <p:nvSpPr>
+          <p:cNvPr id="6" name="TextBox 5"/>
+          <p:cNvSpPr txBox="1"/>
+          <p:nvPr/>
+        </p:nvSpPr>
+        <p:spPr>
+          <a:xfrm>
+            <a:off x="2822258" y="900112"/>
+            <a:ext cx="4642485" cy="171450"/>
+          </a:xfrm>
+          <a:prstGeom prst="rect">
+            <a:avLst/>
+          </a:prstGeom>
+          <a:noFill/>
+        </p:spPr>
+        <p:txBody>
+          <a:bodyPr wrap="none" anchor="t" lIns="0" rIns="0" tIns="0" bIns="0"/>
+          <a:lstStyle/>
+          <a:p>
+            <a:pPr algn="ctr"/>
+            <a:r>
+              <a:rPr sz="900" i="0" b="0" spc="378">
+                <a:solidFill>
+                  <a:srgbClr val="97A98C"/>
+                </a:solidFill>
+                <a:latin typeface="Poppins"/>
+                <a:ea typeface="Poppins"/>
+                <a:cs typeface="Poppins"/>
+              </a:rPr>
+              <a:t>BLACK LIZARD INTERACTIVE</a:t>
+            </a:r>
+          </a:p>
+        </p:txBody>
+      </p:sp>
+      <p:sp>
+        <p:nvSpPr>
+          <p:cNvPr id="7" name="TextBox 6"/>
+          <p:cNvSpPr txBox="1"/>
+          <p:nvPr/>
+        </p:nvSpPr>
+        <p:spPr>
+          <a:xfrm>
+            <a:off x="-1905000" y="5070872"/>
+            <a:ext cx="14097000" cy="190500"/>
+          </a:xfrm>
+          <a:prstGeom prst="rect">
+            <a:avLst/>
+          </a:prstGeom>
+          <a:noFill/>
+        </p:spPr>
+        <p:txBody>
+          <a:bodyPr wrap="none" anchor="t" lIns="0" rIns="0" tIns="0" bIns="0"/>
+          <a:lstStyle/>
+          <a:p>
+            <a:pPr algn="ctr"/>
+            <a:r>
+              <a:rPr sz="975" i="0" b="0" spc="487">
+                <a:solidFill>
+                  <a:srgbClr val="97A98C"/>
+                </a:solidFill>
+                <a:latin typeface="Poppins"/>
+                <a:ea typeface="Poppins"/>
+                <a:cs typeface="Poppins"/>
+              </a:rPr>
+              <a:t>THE BRIGHT AGENT</a:t>
+            </a:r>
+          </a:p>
+        </p:txBody>
+      </p:sp>
+      <p:sp>
+        <p:nvSpPr>
+          <p:cNvPr id="8" name="TextBox 7"/>
+          <p:cNvSpPr txBox="1"/>
+          <p:nvPr/>
+        </p:nvSpPr>
+        <p:spPr>
+          <a:xfrm>
+            <a:off x="-1905000" y="5432822"/>
+            <a:ext cx="14097000" cy="1045369"/>
+          </a:xfrm>
+          <a:prstGeom prst="rect">
+            <a:avLst/>
+          </a:prstGeom>
+          <a:noFill/>
+        </p:spPr>
+        <p:txBody>
+          <a:bodyPr wrap="none" anchor="t" lIns="0" rIns="0" tIns="0" bIns="0"/>
+          <a:lstStyle/>
+          <a:p>
+            <a:pPr algn="ctr">
+              <a:lnSpc>
+                <a:spcPct val="98000"/>
+              </a:lnSpc>
+            </a:pPr>
+            <a:r>
+              <a:rPr sz="8400" i="1" b="0">
+                <a:solidFill>
+                  <a:srgbClr val="33322E"/>
+                </a:solidFill>
+                <a:latin typeface="Cormorant Garamond"/>
+                <a:ea typeface="Cormorant Garamond"/>
+                <a:cs typeface="Cormorant Garamond"/>
+              </a:rPr>
+              <a:t>Collection</a:t>
+            </a:r>
+          </a:p>
+        </p:txBody>
+      </p:sp>
+      <p:sp>
+        <p:nvSpPr>
+          <p:cNvPr id="9" name="TextBox 8"/>
+          <p:cNvSpPr txBox="1"/>
+          <p:nvPr/>
+        </p:nvSpPr>
+        <p:spPr>
+          <a:xfrm>
+            <a:off x="-1905000" y="7135416"/>
+            <a:ext cx="14097000" cy="190500"/>
+          </a:xfrm>
+          <a:prstGeom prst="rect">
+            <a:avLst/>
+          </a:prstGeom>
+          <a:noFill/>
+        </p:spPr>
+        <p:txBody>
+          <a:bodyPr wrap="none" anchor="t" lIns="0" rIns="0" tIns="0" bIns="0"/>
+          <a:lstStyle/>
+          <a:p>
+            <a:pPr algn="ctr"/>
+            <a:r>
+              <a:rPr sz="975" i="0" b="0" spc="273">
+                <a:solidFill>
+                  <a:srgbClr val="8A867E"/>
+                </a:solidFill>
+                <a:latin typeface="Poppins"/>
+                <a:ea typeface="Poppins"/>
+                <a:cs typeface="Poppins"/>
+              </a:rPr>
+              <a:t>BRIGHT &amp; AIRY REAL ESTATE BRANDING KIT</a:t>
+            </a:r>
+          </a:p>
+        </p:txBody>
+      </p:sp>
+      <p:sp>
+        <p:nvSpPr>
+          <p:cNvPr id="10" name="TextBox 9"/>
+          <p:cNvSpPr txBox="1"/>
+          <p:nvPr/>
+        </p:nvSpPr>
+        <p:spPr>
+          <a:xfrm>
+            <a:off x="-1905000" y="7516416"/>
+            <a:ext cx="14097000" cy="323850"/>
+          </a:xfrm>
+          <a:prstGeom prst="rect">
+            <a:avLst/>
+          </a:prstGeom>
+          <a:noFill/>
+        </p:spPr>
+        <p:txBody>
+          <a:bodyPr wrap="none" anchor="t" lIns="0" rIns="0" tIns="0" bIns="0"/>
+          <a:lstStyle/>
+          <a:p>
+            <a:pPr algn="ctr"/>
+            <a:r>
+              <a:rPr sz="2250" i="1" b="0">
+                <a:solidFill>
+                  <a:srgbClr val="33322E"/>
+                </a:solidFill>
+                <a:latin typeface="Cormorant Garamond"/>
+                <a:ea typeface="Cormorant Garamond"/>
+                <a:cs typeface="Cormorant Garamond"/>
+              </a:rPr>
+              <a:t>40 editable Canva templates</a:t>
+            </a:r>
+          </a:p>
+        </p:txBody>
+      </p:sp>
+      <p:sp>
+        <p:nvSpPr>
+          <p:cNvPr id="11" name="TextBox 10"/>
+          <p:cNvSpPr txBox="1"/>
+          <p:nvPr/>
+        </p:nvSpPr>
+        <p:spPr>
+          <a:xfrm>
+            <a:off x="-1905000" y="11839575"/>
+            <a:ext cx="14097000" cy="161925"/>
+          </a:xfrm>
+          <a:prstGeom prst="rect">
+            <a:avLst/>
+          </a:prstGeom>
+          <a:noFill/>
+        </p:spPr>
+        <p:txBody>
+          <a:bodyPr wrap="none" anchor="t" lIns="0" rIns="0" tIns="0" bIns="0"/>
+          <a:lstStyle/>
+          <a:p>
+            <a:pPr algn="ctr"/>
+            <a:r>
+              <a:rPr sz="825" i="0" b="0" spc="280">
+                <a:solidFill>
+                  <a:srgbClr val="8A867E"/>
+                </a:solidFill>
+                <a:latin typeface="Poppins"/>
+                <a:ea typeface="Poppins"/>
+                <a:cs typeface="Poppins"/>
+              </a:rPr>
+              <a:t>FEED POSTS · STORIES · HIGHLIGHTS · PRINT</a:t>
+            </a:r>
+          </a:p>
+        </p:txBody>
+      </p:sp>
     </p:spTree>
   </p:cSld>
   <p:clrMapOvr>
